--- a/Diagrams/sketches.pptx
+++ b/Diagrams/sketches.pptx
@@ -8,6 +8,7 @@
     <p:sldId id="256" r:id="rId2"/>
     <p:sldId id="257" r:id="rId3"/>
     <p:sldId id="258" r:id="rId4"/>
+    <p:sldId id="259" r:id="rId5"/>
   </p:sldIdLst>
   <p:sldSz cx="12192000" cy="6858000"/>
   <p:notesSz cx="6858000" cy="9144000"/>
@@ -117,7 +118,7 @@
 <file path=ppt/revisionInfo.xml><?xml version="1.0" encoding="utf-8"?>
 <p1510:revInfo xmlns:a="http://schemas.openxmlformats.org/drawingml/2006/main" xmlns:r="http://schemas.openxmlformats.org/officeDocument/2006/relationships" xmlns:p1510="http://schemas.microsoft.com/office/powerpoint/2015/10/main">
   <p1510:revLst>
-    <p1510:client id="{D14590B5-F4C5-4746-AB4E-68C4180F455B}" v="6" dt="2026-04-18T09:35:53.901"/>
+    <p1510:client id="{D14590B5-F4C5-4746-AB4E-68C4180F455B}" v="8" dt="2026-04-18T09:40:04.994"/>
   </p1510:revLst>
 </p1510:revInfo>
 </file>
@@ -127,12 +128,12 @@
   <pc:docChgLst>
     <pc:chgData name="John ORaw" userId="bd8eb5d603dcbe81" providerId="LiveId" clId="{E9D21DE7-F0F0-4313-A7DF-CD85E17FB345}"/>
     <pc:docChg chg="addSld modSld">
-      <pc:chgData name="John ORaw" userId="bd8eb5d603dcbe81" providerId="LiveId" clId="{E9D21DE7-F0F0-4313-A7DF-CD85E17FB345}" dt="2026-04-18T09:35:53.901" v="50"/>
+      <pc:chgData name="John ORaw" userId="bd8eb5d603dcbe81" providerId="LiveId" clId="{E9D21DE7-F0F0-4313-A7DF-CD85E17FB345}" dt="2026-04-18T09:42:14.651" v="109" actId="207"/>
       <pc:docMkLst>
         <pc:docMk/>
       </pc:docMkLst>
       <pc:sldChg chg="addSp modSp new mod">
-        <pc:chgData name="John ORaw" userId="bd8eb5d603dcbe81" providerId="LiveId" clId="{E9D21DE7-F0F0-4313-A7DF-CD85E17FB345}" dt="2026-04-18T09:35:53.901" v="50"/>
+        <pc:chgData name="John ORaw" userId="bd8eb5d603dcbe81" providerId="LiveId" clId="{E9D21DE7-F0F0-4313-A7DF-CD85E17FB345}" dt="2026-04-18T09:41:17.904" v="107" actId="167"/>
         <pc:sldMkLst>
           <pc:docMk/>
           <pc:sldMk cId="170060802" sldId="258"/>
@@ -169,8 +170,8 @@
             <ac:spMk id="5" creationId="{6D1FABE1-9AF3-C745-F435-316A91CABCF5}"/>
           </ac:spMkLst>
         </pc:spChg>
-        <pc:spChg chg="add mod">
-          <ac:chgData name="John ORaw" userId="bd8eb5d603dcbe81" providerId="LiveId" clId="{E9D21DE7-F0F0-4313-A7DF-CD85E17FB345}" dt="2026-04-18T09:34:48.125" v="41" actId="207"/>
+        <pc:spChg chg="add mod ord">
+          <ac:chgData name="John ORaw" userId="bd8eb5d603dcbe81" providerId="LiveId" clId="{E9D21DE7-F0F0-4313-A7DF-CD85E17FB345}" dt="2026-04-18T09:41:17.904" v="107" actId="167"/>
           <ac:spMkLst>
             <pc:docMk/>
             <pc:sldMk cId="170060802" sldId="258"/>
@@ -185,6 +186,37 @@
             <ac:cxnSpMk id="7" creationId="{03614FA3-1EE3-A455-29CD-517916842ED2}"/>
           </ac:cxnSpMkLst>
         </pc:cxnChg>
+      </pc:sldChg>
+      <pc:sldChg chg="addSp modSp add mod">
+        <pc:chgData name="John ORaw" userId="bd8eb5d603dcbe81" providerId="LiveId" clId="{E9D21DE7-F0F0-4313-A7DF-CD85E17FB345}" dt="2026-04-18T09:42:14.651" v="109" actId="207"/>
+        <pc:sldMkLst>
+          <pc:docMk/>
+          <pc:sldMk cId="753304688" sldId="259"/>
+        </pc:sldMkLst>
+        <pc:spChg chg="add mod">
+          <ac:chgData name="John ORaw" userId="bd8eb5d603dcbe81" providerId="LiveId" clId="{E9D21DE7-F0F0-4313-A7DF-CD85E17FB345}" dt="2026-04-18T09:39:25.159" v="78" actId="14100"/>
+          <ac:spMkLst>
+            <pc:docMk/>
+            <pc:sldMk cId="753304688" sldId="259"/>
+            <ac:spMk id="6" creationId="{ABB28ED4-178C-5448-AF94-A147E8A4DE72}"/>
+          </ac:spMkLst>
+        </pc:spChg>
+        <pc:spChg chg="mod ord">
+          <ac:chgData name="John ORaw" userId="bd8eb5d603dcbe81" providerId="LiveId" clId="{E9D21DE7-F0F0-4313-A7DF-CD85E17FB345}" dt="2026-04-18T09:41:10.953" v="106" actId="207"/>
+          <ac:spMkLst>
+            <pc:docMk/>
+            <pc:sldMk cId="753304688" sldId="259"/>
+            <ac:spMk id="8" creationId="{EEA5F249-2272-CECD-DB10-F382B83268D7}"/>
+          </ac:spMkLst>
+        </pc:spChg>
+        <pc:spChg chg="add mod">
+          <ac:chgData name="John ORaw" userId="bd8eb5d603dcbe81" providerId="LiveId" clId="{E9D21DE7-F0F0-4313-A7DF-CD85E17FB345}" dt="2026-04-18T09:42:14.651" v="109" actId="207"/>
+          <ac:spMkLst>
+            <pc:docMk/>
+            <pc:sldMk cId="753304688" sldId="259"/>
+            <ac:spMk id="9" creationId="{0AD6591C-ADB9-6666-C5FA-559F42E31879}"/>
+          </ac:spMkLst>
+        </pc:spChg>
       </pc:sldChg>
     </pc:docChg>
   </pc:docChgLst>
@@ -5252,6 +5284,65 @@
       </p:grpSpPr>
       <p:sp>
         <p:nvSpPr>
+          <p:cNvPr id="8" name="Rectangle: Rounded Corners 7">
+            <a:extLst>
+              <a:ext uri="{FF2B5EF4-FFF2-40B4-BE49-F238E27FC236}">
+                <a16:creationId xmlns:a16="http://schemas.microsoft.com/office/drawing/2014/main" id="{67339A52-3879-4CC3-9D5F-FF5E0D10BE87}"/>
+              </a:ext>
+            </a:extLst>
+          </p:cNvPr>
+          <p:cNvSpPr/>
+          <p:nvPr/>
+        </p:nvSpPr>
+        <p:spPr>
+          <a:xfrm>
+            <a:off x="4090218" y="1573162"/>
+            <a:ext cx="3313471" cy="2733367"/>
+          </a:xfrm>
+          <a:prstGeom prst="roundRect">
+            <a:avLst/>
+          </a:prstGeom>
+          <a:solidFill>
+            <a:schemeClr val="tx2">
+              <a:lumMod val="10000"/>
+              <a:lumOff val="90000"/>
+            </a:schemeClr>
+          </a:solidFill>
+        </p:spPr>
+        <p:style>
+          <a:lnRef idx="2">
+            <a:schemeClr val="accent1">
+              <a:shade val="15000"/>
+            </a:schemeClr>
+          </a:lnRef>
+          <a:fillRef idx="1">
+            <a:schemeClr val="accent1"/>
+          </a:fillRef>
+          <a:effectRef idx="0">
+            <a:schemeClr val="accent1"/>
+          </a:effectRef>
+          <a:fontRef idx="minor">
+            <a:schemeClr val="lt1"/>
+          </a:fontRef>
+        </p:style>
+        <p:txBody>
+          <a:bodyPr vert="vert270" rtlCol="0" anchor="b" anchorCtr="1"/>
+          <a:lstStyle/>
+          <a:p>
+            <a:pPr algn="ctr"/>
+            <a:r>
+              <a:rPr lang="en-IE" dirty="0">
+                <a:solidFill>
+                  <a:schemeClr val="tx2"/>
+                </a:solidFill>
+              </a:rPr>
+              <a:t>Image</a:t>
+            </a:r>
+          </a:p>
+        </p:txBody>
+      </p:sp>
+      <p:sp>
+        <p:nvSpPr>
           <p:cNvPr id="2" name="Rectangle 1">
             <a:extLst>
               <a:ext uri="{FF2B5EF4-FFF2-40B4-BE49-F238E27FC236}">
@@ -5493,12 +5584,48 @@
           </a:fontRef>
         </p:style>
       </p:cxnSp>
+    </p:spTree>
+    <p:extLst>
+      <p:ext uri="{BB962C8B-B14F-4D97-AF65-F5344CB8AC3E}">
+        <p14:creationId xmlns:p14="http://schemas.microsoft.com/office/powerpoint/2010/main" val="170060802"/>
+      </p:ext>
+    </p:extLst>
+  </p:cSld>
+  <p:clrMapOvr>
+    <a:masterClrMapping/>
+  </p:clrMapOvr>
+</p:sld>
+</file>
+
+<file path=ppt/slides/slide4.xml><?xml version="1.0" encoding="utf-8"?>
+<p:sld xmlns:a="http://schemas.openxmlformats.org/drawingml/2006/main" xmlns:r="http://schemas.openxmlformats.org/officeDocument/2006/relationships" xmlns:p="http://schemas.openxmlformats.org/presentationml/2006/main">
+  <p:cSld>
+    <p:spTree>
+      <p:nvGrpSpPr>
+        <p:cNvPr id="1" name="">
+          <a:extLst>
+            <a:ext uri="{FF2B5EF4-FFF2-40B4-BE49-F238E27FC236}">
+              <a16:creationId xmlns:a16="http://schemas.microsoft.com/office/drawing/2014/main" id="{E0C2B068-4027-6D88-B53E-F27E306856C1}"/>
+            </a:ext>
+          </a:extLst>
+        </p:cNvPr>
+        <p:cNvGrpSpPr/>
+        <p:nvPr/>
+      </p:nvGrpSpPr>
+      <p:grpSpPr>
+        <a:xfrm>
+          <a:off x="0" y="0"/>
+          <a:ext cx="0" cy="0"/>
+          <a:chOff x="0" y="0"/>
+          <a:chExt cx="0" cy="0"/>
+        </a:xfrm>
+      </p:grpSpPr>
       <p:sp>
         <p:nvSpPr>
           <p:cNvPr id="8" name="Rectangle: Rounded Corners 7">
             <a:extLst>
               <a:ext uri="{FF2B5EF4-FFF2-40B4-BE49-F238E27FC236}">
-                <a16:creationId xmlns:a16="http://schemas.microsoft.com/office/drawing/2014/main" id="{67339A52-3879-4CC3-9D5F-FF5E0D10BE87}"/>
+                <a16:creationId xmlns:a16="http://schemas.microsoft.com/office/drawing/2014/main" id="{EEA5F249-2272-CECD-DB10-F382B83268D7}"/>
               </a:ext>
             </a:extLst>
           </p:cNvPr>
@@ -5509,6 +5636,308 @@
           <a:xfrm>
             <a:off x="4090218" y="1573162"/>
             <a:ext cx="3313471" cy="2733367"/>
+          </a:xfrm>
+          <a:prstGeom prst="roundRect">
+            <a:avLst/>
+          </a:prstGeom>
+          <a:solidFill>
+            <a:schemeClr val="tx2">
+              <a:lumMod val="10000"/>
+              <a:lumOff val="90000"/>
+            </a:schemeClr>
+          </a:solidFill>
+        </p:spPr>
+        <p:style>
+          <a:lnRef idx="2">
+            <a:schemeClr val="accent1">
+              <a:shade val="15000"/>
+            </a:schemeClr>
+          </a:lnRef>
+          <a:fillRef idx="1">
+            <a:schemeClr val="accent1"/>
+          </a:fillRef>
+          <a:effectRef idx="0">
+            <a:schemeClr val="accent1"/>
+          </a:effectRef>
+          <a:fontRef idx="minor">
+            <a:schemeClr val="lt1"/>
+          </a:fontRef>
+        </p:style>
+        <p:txBody>
+          <a:bodyPr vert="vert270" rtlCol="0" anchor="b" anchorCtr="1"/>
+          <a:lstStyle/>
+          <a:p>
+            <a:pPr algn="ctr"/>
+            <a:r>
+              <a:rPr lang="en-IE" dirty="0">
+                <a:solidFill>
+                  <a:schemeClr val="tx2"/>
+                </a:solidFill>
+              </a:rPr>
+              <a:t>Image (RO)</a:t>
+            </a:r>
+          </a:p>
+        </p:txBody>
+      </p:sp>
+      <p:sp>
+        <p:nvSpPr>
+          <p:cNvPr id="2" name="Rectangle 1">
+            <a:extLst>
+              <a:ext uri="{FF2B5EF4-FFF2-40B4-BE49-F238E27FC236}">
+                <a16:creationId xmlns:a16="http://schemas.microsoft.com/office/drawing/2014/main" id="{D2427E0D-DCFC-921E-5422-FDCAA67C17DF}"/>
+              </a:ext>
+            </a:extLst>
+          </p:cNvPr>
+          <p:cNvSpPr/>
+          <p:nvPr/>
+        </p:nvSpPr>
+        <p:spPr>
+          <a:xfrm>
+            <a:off x="4296697" y="1789471"/>
+            <a:ext cx="2467897" cy="432619"/>
+          </a:xfrm>
+          <a:prstGeom prst="rect">
+            <a:avLst/>
+          </a:prstGeom>
+        </p:spPr>
+        <p:style>
+          <a:lnRef idx="2">
+            <a:schemeClr val="accent1">
+              <a:shade val="15000"/>
+            </a:schemeClr>
+          </a:lnRef>
+          <a:fillRef idx="1">
+            <a:schemeClr val="accent1"/>
+          </a:fillRef>
+          <a:effectRef idx="0">
+            <a:schemeClr val="accent1"/>
+          </a:effectRef>
+          <a:fontRef idx="minor">
+            <a:schemeClr val="lt1"/>
+          </a:fontRef>
+        </p:style>
+        <p:txBody>
+          <a:bodyPr rtlCol="0" anchor="ctr"/>
+          <a:lstStyle/>
+          <a:p>
+            <a:pPr algn="ctr"/>
+            <a:r>
+              <a:rPr lang="en-IE" dirty="0"/>
+              <a:t>Instruction/Layer 1</a:t>
+            </a:r>
+          </a:p>
+        </p:txBody>
+      </p:sp>
+      <p:sp>
+        <p:nvSpPr>
+          <p:cNvPr id="3" name="Rectangle 2">
+            <a:extLst>
+              <a:ext uri="{FF2B5EF4-FFF2-40B4-BE49-F238E27FC236}">
+                <a16:creationId xmlns:a16="http://schemas.microsoft.com/office/drawing/2014/main" id="{0A8B4121-8BCB-A1E6-8BF4-C630A6C32955}"/>
+              </a:ext>
+            </a:extLst>
+          </p:cNvPr>
+          <p:cNvSpPr/>
+          <p:nvPr/>
+        </p:nvSpPr>
+        <p:spPr>
+          <a:xfrm>
+            <a:off x="4296696" y="2310580"/>
+            <a:ext cx="2467897" cy="432619"/>
+          </a:xfrm>
+          <a:prstGeom prst="rect">
+            <a:avLst/>
+          </a:prstGeom>
+        </p:spPr>
+        <p:style>
+          <a:lnRef idx="2">
+            <a:schemeClr val="accent1">
+              <a:shade val="15000"/>
+            </a:schemeClr>
+          </a:lnRef>
+          <a:fillRef idx="1">
+            <a:schemeClr val="accent1"/>
+          </a:fillRef>
+          <a:effectRef idx="0">
+            <a:schemeClr val="accent1"/>
+          </a:effectRef>
+          <a:fontRef idx="minor">
+            <a:schemeClr val="lt1"/>
+          </a:fontRef>
+        </p:style>
+        <p:txBody>
+          <a:bodyPr rtlCol="0" anchor="ctr"/>
+          <a:lstStyle/>
+          <a:p>
+            <a:pPr algn="ctr"/>
+            <a:r>
+              <a:rPr lang="en-IE" dirty="0"/>
+              <a:t>Instruction/Layer 2</a:t>
+            </a:r>
+          </a:p>
+        </p:txBody>
+      </p:sp>
+      <p:sp>
+        <p:nvSpPr>
+          <p:cNvPr id="4" name="Rectangle 3">
+            <a:extLst>
+              <a:ext uri="{FF2B5EF4-FFF2-40B4-BE49-F238E27FC236}">
+                <a16:creationId xmlns:a16="http://schemas.microsoft.com/office/drawing/2014/main" id="{B25E4B04-9886-89A8-F6D2-ABCB60DC18F7}"/>
+              </a:ext>
+            </a:extLst>
+          </p:cNvPr>
+          <p:cNvSpPr/>
+          <p:nvPr/>
+        </p:nvSpPr>
+        <p:spPr>
+          <a:xfrm>
+            <a:off x="4296695" y="2831689"/>
+            <a:ext cx="2467897" cy="432619"/>
+          </a:xfrm>
+          <a:prstGeom prst="rect">
+            <a:avLst/>
+          </a:prstGeom>
+        </p:spPr>
+        <p:style>
+          <a:lnRef idx="2">
+            <a:schemeClr val="accent1">
+              <a:shade val="15000"/>
+            </a:schemeClr>
+          </a:lnRef>
+          <a:fillRef idx="1">
+            <a:schemeClr val="accent1"/>
+          </a:fillRef>
+          <a:effectRef idx="0">
+            <a:schemeClr val="accent1"/>
+          </a:effectRef>
+          <a:fontRef idx="minor">
+            <a:schemeClr val="lt1"/>
+          </a:fontRef>
+        </p:style>
+        <p:txBody>
+          <a:bodyPr rtlCol="0" anchor="ctr"/>
+          <a:lstStyle/>
+          <a:p>
+            <a:pPr algn="ctr"/>
+            <a:r>
+              <a:rPr lang="en-IE" dirty="0"/>
+              <a:t>Instruction/Layer 3</a:t>
+            </a:r>
+          </a:p>
+        </p:txBody>
+      </p:sp>
+      <p:sp>
+        <p:nvSpPr>
+          <p:cNvPr id="5" name="Rectangle 4">
+            <a:extLst>
+              <a:ext uri="{FF2B5EF4-FFF2-40B4-BE49-F238E27FC236}">
+                <a16:creationId xmlns:a16="http://schemas.microsoft.com/office/drawing/2014/main" id="{DF60996C-67E5-7A1E-85B5-84606B8EBF77}"/>
+              </a:ext>
+            </a:extLst>
+          </p:cNvPr>
+          <p:cNvSpPr/>
+          <p:nvPr/>
+        </p:nvSpPr>
+        <p:spPr>
+          <a:xfrm>
+            <a:off x="4296694" y="3657597"/>
+            <a:ext cx="2467897" cy="432619"/>
+          </a:xfrm>
+          <a:prstGeom prst="rect">
+            <a:avLst/>
+          </a:prstGeom>
+        </p:spPr>
+        <p:style>
+          <a:lnRef idx="2">
+            <a:schemeClr val="accent1">
+              <a:shade val="15000"/>
+            </a:schemeClr>
+          </a:lnRef>
+          <a:fillRef idx="1">
+            <a:schemeClr val="accent1"/>
+          </a:fillRef>
+          <a:effectRef idx="0">
+            <a:schemeClr val="accent1"/>
+          </a:effectRef>
+          <a:fontRef idx="minor">
+            <a:schemeClr val="lt1"/>
+          </a:fontRef>
+        </p:style>
+        <p:txBody>
+          <a:bodyPr rtlCol="0" anchor="ctr"/>
+          <a:lstStyle/>
+          <a:p>
+            <a:pPr algn="ctr"/>
+            <a:r>
+              <a:rPr lang="en-IE" dirty="0"/>
+              <a:t>Instruction/Layer </a:t>
+            </a:r>
+            <a:r>
+              <a:rPr lang="en-IE" i="1" dirty="0"/>
+              <a:t>n</a:t>
+            </a:r>
+          </a:p>
+        </p:txBody>
+      </p:sp>
+      <p:cxnSp>
+        <p:nvCxnSpPr>
+          <p:cNvPr id="7" name="Straight Arrow Connector 6">
+            <a:extLst>
+              <a:ext uri="{FF2B5EF4-FFF2-40B4-BE49-F238E27FC236}">
+                <a16:creationId xmlns:a16="http://schemas.microsoft.com/office/drawing/2014/main" id="{5E1BFAEB-8862-B38E-C7D9-9E9D9F4F0FEB}"/>
+              </a:ext>
+            </a:extLst>
+          </p:cNvPr>
+          <p:cNvCxnSpPr>
+            <a:stCxn id="4" idx="2"/>
+            <a:endCxn id="5" idx="0"/>
+          </p:cNvCxnSpPr>
+          <p:nvPr/>
+        </p:nvCxnSpPr>
+        <p:spPr>
+          <a:xfrm flipH="1">
+            <a:off x="5530643" y="3264308"/>
+            <a:ext cx="1" cy="393289"/>
+          </a:xfrm>
+          <a:prstGeom prst="straightConnector1">
+            <a:avLst/>
+          </a:prstGeom>
+          <a:ln>
+            <a:headEnd type="triangle"/>
+            <a:tailEnd type="triangle"/>
+          </a:ln>
+        </p:spPr>
+        <p:style>
+          <a:lnRef idx="2">
+            <a:schemeClr val="accent1"/>
+          </a:lnRef>
+          <a:fillRef idx="0">
+            <a:schemeClr val="accent1"/>
+          </a:fillRef>
+          <a:effectRef idx="1">
+            <a:schemeClr val="accent1"/>
+          </a:effectRef>
+          <a:fontRef idx="minor">
+            <a:schemeClr val="tx1"/>
+          </a:fontRef>
+        </p:style>
+      </p:cxnSp>
+      <p:sp>
+        <p:nvSpPr>
+          <p:cNvPr id="6" name="Rectangle: Rounded Corners 5">
+            <a:extLst>
+              <a:ext uri="{FF2B5EF4-FFF2-40B4-BE49-F238E27FC236}">
+                <a16:creationId xmlns:a16="http://schemas.microsoft.com/office/drawing/2014/main" id="{ABB28ED4-178C-5448-AF94-A147E8A4DE72}"/>
+              </a:ext>
+            </a:extLst>
+          </p:cNvPr>
+          <p:cNvSpPr/>
+          <p:nvPr/>
+        </p:nvSpPr>
+        <p:spPr>
+          <a:xfrm>
+            <a:off x="3873906" y="806245"/>
+            <a:ext cx="4277036" cy="3716593"/>
           </a:xfrm>
           <a:prstGeom prst="roundRect">
             <a:avLst/>
@@ -5542,7 +5971,66 @@
                   <a:schemeClr val="tx2"/>
                 </a:solidFill>
               </a:rPr>
-              <a:t>Image</a:t>
+              <a:t>Container (RW)</a:t>
+            </a:r>
+          </a:p>
+        </p:txBody>
+      </p:sp>
+      <p:sp>
+        <p:nvSpPr>
+          <p:cNvPr id="9" name="Rectangle 8">
+            <a:extLst>
+              <a:ext uri="{FF2B5EF4-FFF2-40B4-BE49-F238E27FC236}">
+                <a16:creationId xmlns:a16="http://schemas.microsoft.com/office/drawing/2014/main" id="{0AD6591C-ADB9-6666-C5FA-559F42E31879}"/>
+              </a:ext>
+            </a:extLst>
+          </p:cNvPr>
+          <p:cNvSpPr/>
+          <p:nvPr/>
+        </p:nvSpPr>
+        <p:spPr>
+          <a:xfrm>
+            <a:off x="4296694" y="963562"/>
+            <a:ext cx="3106995" cy="432619"/>
+          </a:xfrm>
+          <a:prstGeom prst="rect">
+            <a:avLst/>
+          </a:prstGeom>
+          <a:solidFill>
+            <a:schemeClr val="tx2">
+              <a:lumMod val="10000"/>
+              <a:lumOff val="90000"/>
+            </a:schemeClr>
+          </a:solidFill>
+        </p:spPr>
+        <p:style>
+          <a:lnRef idx="2">
+            <a:schemeClr val="accent1">
+              <a:shade val="15000"/>
+            </a:schemeClr>
+          </a:lnRef>
+          <a:fillRef idx="1">
+            <a:schemeClr val="accent1"/>
+          </a:fillRef>
+          <a:effectRef idx="0">
+            <a:schemeClr val="accent1"/>
+          </a:effectRef>
+          <a:fontRef idx="minor">
+            <a:schemeClr val="lt1"/>
+          </a:fontRef>
+        </p:style>
+        <p:txBody>
+          <a:bodyPr rtlCol="0" anchor="ctr"/>
+          <a:lstStyle/>
+          <a:p>
+            <a:pPr algn="ctr"/>
+            <a:r>
+              <a:rPr lang="en-IE" dirty="0">
+                <a:solidFill>
+                  <a:schemeClr val="tx2"/>
+                </a:solidFill>
+              </a:rPr>
+              <a:t>Container Layer</a:t>
             </a:r>
           </a:p>
         </p:txBody>
@@ -5550,7 +6038,7 @@
     </p:spTree>
     <p:extLst>
       <p:ext uri="{BB962C8B-B14F-4D97-AF65-F5344CB8AC3E}">
-        <p14:creationId xmlns:p14="http://schemas.microsoft.com/office/powerpoint/2010/main" val="170060802"/>
+        <p14:creationId xmlns:p14="http://schemas.microsoft.com/office/powerpoint/2010/main" val="753304688"/>
       </p:ext>
     </p:extLst>
   </p:cSld>
